--- a/weekly-report/fixtures/weekly-report-fixture-kit/results/P-ROL-102/output/P-ROL-102_2026-W39.pptx
+++ b/weekly-report/fixtures/weekly-report-fixture-kit/results/P-ROL-102/output/P-ROL-102_2026-W39.pptx
@@ -4707,7 +4707,7 @@
                 <a:latin typeface="Arial Narrow"/>
                 <a:ea typeface="LG스마트체 Regular" panose="020B0600000101010101" pitchFamily="50" charset="-127"/>
               </a:rPr>
-              <a:t>업데이트 시간 : 10/3 20시</a:t>
+              <a:t>업데이트 시간 : 10/3 21시</a:t>
             </a:r>
             <a:endParaRPr lang="ko-KR" sz="1100">
               <a:latin typeface="+mn-lt"/>
@@ -4961,18 +4961,7 @@
                 <a:ea typeface="LG스마트체 Regular" panose="020B0600000101010101" pitchFamily="50" charset="-127"/>
                 <a:cs typeface="Arial Narrow"/>
               </a:rPr>
-              <a:t>[배경] </a:t>
-            </a:r>
-            <a:r>
-              <a:rPr sz="900" b="0">
-                <a:solidFill>
-                  <a:srgbClr val="000000"/>
-                </a:solidFill>
-                <a:latin typeface="Arial Narrow"/>
-                <a:ea typeface="LG스마트체 Regular" panose="020B0600000101010101" pitchFamily="50" charset="-127"/>
-                <a:cs typeface="Arial Narrow"/>
-              </a:rPr>
-              <a:t>보고 자동화 검증을 위한 합성 과제</a:t>
+              <a:t>[배경/목표]</a:t>
             </a:r>
             <a:endParaRPr lang="ko-KR" sz="900" dirty="0">
               <a:ea typeface="LG스마트체 Regular" panose="020B0600000101010101" pitchFamily="50" charset="-127"/>
@@ -4992,17 +4981,6 @@
               </a:spcAft>
             </a:pPr>
             <a:r>
-              <a:rPr sz="900" b="1">
-                <a:solidFill>
-                  <a:srgbClr val="000000"/>
-                </a:solidFill>
-                <a:latin typeface="Arial Narrow"/>
-                <a:ea typeface="LG스마트체 Regular" panose="020B0600000101010101" pitchFamily="50" charset="-127"/>
-                <a:cs typeface="Arial Narrow"/>
-              </a:rPr>
-              <a:t>[목표] </a:t>
-            </a:r>
-            <a:r>
               <a:rPr sz="900" b="0">
                 <a:solidFill>
                   <a:srgbClr val="000000"/>
@@ -5011,7 +4989,7 @@
                 <a:ea typeface="LG스마트체 Regular" panose="020B0600000101010101" pitchFamily="50" charset="-127"/>
                 <a:cs typeface="Arial Narrow"/>
               </a:rPr>
-              <a:t>실제 업무 데이터 없이 파이프라인 검증</a:t>
+              <a:t>- 보고 자동화 검증을 위한 합성 과제. 실제 업무 데이터 없이 파이프라인 검증</a:t>
             </a:r>
             <a:endParaRPr lang="ko-KR" sz="900" dirty="0">
               <a:ea typeface="LG스마트체 Regular" panose="020B0600000101010101" pitchFamily="50" charset="-127"/>
@@ -5570,7 +5548,7 @@
                           <a:ea typeface="LG스마트체 Regular" panose="020B0600000101010101" pitchFamily="50" charset="-127"/>
                           <a:cs typeface="Arial Narrow"/>
                         </a:rPr>
-                        <a:t>4. 사이트 적용 완료 4개 사이트</a:t>
+                        <a:t>사이트 적용 완료 4개 사이트</a:t>
                       </a:r>
                       <a:endParaRPr lang="ko-KR" sz="900" dirty="0">
                         <a:latin typeface="+mn-lt"/>
@@ -5986,7 +5964,7 @@
                           <a:ea typeface="LG스마트체 Regular" panose="020B0600000101010101" pitchFamily="50" charset="-127"/>
                           <a:cs typeface="Arial Narrow"/>
                         </a:rPr>
-                        <a:t>4-5. 사이트 적용</a:t>
+                        <a:t>사이트 적용</a:t>
                       </a:r>
                       <a:endParaRPr lang="ko-KR" sz="900" dirty="0">
                         <a:latin typeface="+mn-lt"/>
@@ -6402,7 +6380,7 @@
                           <a:ea typeface="LG스마트체 Regular" panose="020B0600000101010101" pitchFamily="50" charset="-127"/>
                           <a:cs typeface="Arial Narrow"/>
                         </a:rPr>
-                        <a:t>4-6. 사이트 적용</a:t>
+                        <a:t>사이트 적용</a:t>
                       </a:r>
                       <a:endParaRPr lang="ko-KR" sz="900" dirty="0">
                         <a:latin typeface="+mn-lt"/>
@@ -6818,7 +6796,7 @@
                           <a:ea typeface="LG스마트체 Regular" panose="020B0600000101010101" pitchFamily="50" charset="-127"/>
                           <a:cs typeface="Arial Narrow"/>
                         </a:rPr>
-                        <a:t>4-7. 사이트 적용</a:t>
+                        <a:t>사이트 적용</a:t>
                       </a:r>
                       <a:endParaRPr lang="ko-KR" sz="900" dirty="0">
                         <a:latin typeface="+mn-lt"/>
@@ -7234,7 +7212,7 @@
                           <a:ea typeface="LG스마트체 Regular" panose="020B0600000101010101" pitchFamily="50" charset="-127"/>
                           <a:cs typeface="Arial Narrow"/>
                         </a:rPr>
-                        <a:t>4-8. 사이트 적용</a:t>
+                        <a:t>사이트 적용</a:t>
                       </a:r>
                       <a:endParaRPr lang="ko-KR" sz="900" dirty="0">
                         <a:latin typeface="+mn-lt"/>
@@ -7650,7 +7628,7 @@
                           <a:ea typeface="LG스마트체 Regular" panose="020B0600000101010101" pitchFamily="50" charset="-127"/>
                           <a:cs typeface="Arial Narrow"/>
                         </a:rPr>
-                        <a:t>4-9. 사이트 적용</a:t>
+                        <a:t>사이트 적용</a:t>
                       </a:r>
                       <a:endParaRPr lang="ko-KR" sz="900" dirty="0">
                         <a:latin typeface="+mn-lt"/>
@@ -8066,7 +8044,7 @@
                           <a:ea typeface="LG스마트체 Regular" panose="020B0600000101010101" pitchFamily="50" charset="-127"/>
                           <a:cs typeface="Arial Narrow"/>
                         </a:rPr>
-                        <a:t>4-10. 사이트 적용</a:t>
+                        <a:t>사이트 적용</a:t>
                       </a:r>
                       <a:endParaRPr lang="ko-KR" sz="900" dirty="0">
                         <a:latin typeface="+mn-lt"/>
@@ -8482,7 +8460,7 @@
                           <a:ea typeface="LG스마트체 Regular" panose="020B0600000101010101" pitchFamily="50" charset="-127"/>
                           <a:cs typeface="Arial Narrow"/>
                         </a:rPr>
-                        <a:t>4-11. 사이트 적용</a:t>
+                        <a:t>사이트 적용</a:t>
                       </a:r>
                       <a:endParaRPr lang="ko-KR" sz="900" dirty="0">
                         <a:latin typeface="+mn-lt"/>
@@ -8898,7 +8876,7 @@
                           <a:ea typeface="LG스마트체 Regular" panose="020B0600000101010101" pitchFamily="50" charset="-127"/>
                           <a:cs typeface="Arial Narrow"/>
                         </a:rPr>
-                        <a:t>4-12. 사이트 적용</a:t>
+                        <a:t>사이트 적용</a:t>
                       </a:r>
                       <a:endParaRPr lang="ko-KR" sz="900" dirty="0">
                         <a:latin typeface="+mn-lt"/>
@@ -9362,7 +9340,7 @@
                 <a:ea typeface="LG스마트체 Regular" panose="020B0600000101010101" pitchFamily="50" charset="-127"/>
                 <a:cs typeface="Arial Narrow"/>
               </a:rPr>
-              <a:t> - WA 적용 일정 9/25 → 9/30 변경</a:t>
+              <a:t>- WA 적용 일정 9/25 → 9/30 변경</a:t>
             </a:r>
             <a:endParaRPr lang="ko-KR" sz="900" dirty="0">
               <a:ea typeface="LG스마트체 Regular" panose="020B0600000101010101" pitchFamily="50" charset="-127"/>
@@ -9435,7 +9413,7 @@
                 <a:ea typeface="LG스마트체 Regular" panose="020B0600000101010101" pitchFamily="50" charset="-127"/>
                 <a:cs typeface="Arial Narrow"/>
               </a:rPr>
-              <a:t> - WA 적용 일정 9/25 → 9/30 변경</a:t>
+              <a:t>- WA 적용 일정 9/25 → 9/30 변경</a:t>
             </a:r>
             <a:endParaRPr lang="ko-KR" sz="900" dirty="0">
               <a:ea typeface="LG스마트체 Regular" panose="020B0600000101010101" pitchFamily="50" charset="-127"/>
@@ -9508,7 +9486,7 @@
                 <a:ea typeface="LG스마트체 Regular" panose="020B0600000101010101" pitchFamily="50" charset="-127"/>
                 <a:cs typeface="Arial Narrow"/>
               </a:rPr>
-              <a:t> - 해당 없음</a:t>
+              <a:t>- 해당 없음</a:t>
             </a:r>
             <a:endParaRPr lang="ko-KR" sz="900" dirty="0">
               <a:ea typeface="LG스마트체 Regular" panose="020B0600000101010101" pitchFamily="50" charset="-127"/>
@@ -9581,7 +9559,7 @@
                 <a:ea typeface="LG스마트체 Regular" panose="020B0600000101010101" pitchFamily="50" charset="-127"/>
                 <a:cs typeface="Arial Narrow"/>
               </a:rPr>
-              <a:t> - 특이사항 없음</a:t>
+              <a:t>- 특이사항 없음</a:t>
             </a:r>
             <a:endParaRPr lang="ko-KR" sz="900" dirty="0">
               <a:ea typeface="LG스마트체 Regular" panose="020B0600000101010101" pitchFamily="50" charset="-127"/>
@@ -9647,12 +9625,12 @@
     <a:fontScheme name="우기글꼴">
       <a:majorFont>
         <a:latin typeface="Arial Narrow"/>
-        <a:ea typeface="LG Smart Regular"/>
+        <a:ea typeface="LG스마트체 Regular"/>
         <a:cs typeface=""/>
       </a:majorFont>
       <a:minorFont>
         <a:latin typeface="Arial Narrow"/>
-        <a:ea typeface="LG Smart Regular"/>
+        <a:ea typeface="LG스마트체 Regular"/>
         <a:cs typeface=""/>
       </a:minorFont>
     </a:fontScheme>

--- a/weekly-report/fixtures/weekly-report-fixture-kit/results/P-ROL-102/output/P-ROL-102_2026-W39.pptx
+++ b/weekly-report/fixtures/weekly-report-fixture-kit/results/P-ROL-102/output/P-ROL-102_2026-W39.pptx
@@ -5013,7 +5013,7 @@
           </p:nvPr>
         </p:nvGraphicFramePr>
         <p:xfrm>
-          <a:off x="1670334" y="1613474"/>
+          <a:off x="1670334" y="1586042"/>
           <a:ext cx="6970743" cy="1979676"/>
         </p:xfrm>
         <a:graphic>
@@ -9278,8 +9278,8 @@
         </p:nvSpPr>
         <p:spPr>
           <a:xfrm>
-            <a:off x="1670334" y="3648014"/>
-            <a:ext cx="6970747" cy="2853370"/>
+            <a:off x="1670334" y="3593150"/>
+            <a:ext cx="6970747" cy="2908234"/>
           </a:xfrm>
           <a:prstGeom prst="rect">
             <a:avLst/>

--- a/weekly-report/fixtures/weekly-report-fixture-kit/results/P-ROL-102/output/P-ROL-102_2026-W39.pptx
+++ b/weekly-report/fixtures/weekly-report-fixture-kit/results/P-ROL-102/output/P-ROL-102_2026-W39.pptx
@@ -4707,7 +4707,7 @@
                 <a:latin typeface="Arial Narrow"/>
                 <a:ea typeface="LG스마트체 Regular" panose="020B0600000101010101" pitchFamily="50" charset="-127"/>
               </a:rPr>
-              <a:t>업데이트 시간 : 10/3 21시</a:t>
+              <a:t>업데이트 시간 : 10/3 22시</a:t>
             </a:r>
             <a:endParaRPr lang="ko-KR" sz="1100">
               <a:latin typeface="+mn-lt"/>

--- a/weekly-report/fixtures/weekly-report-fixture-kit/results/P-ROL-102/output/P-ROL-102_2026-W39.pptx
+++ b/weekly-report/fixtures/weekly-report-fixture-kit/results/P-ROL-102/output/P-ROL-102_2026-W39.pptx
@@ -4707,7 +4707,7 @@
                 <a:latin typeface="Arial Narrow"/>
                 <a:ea typeface="LG스마트체 Regular" panose="020B0600000101010101" pitchFamily="50" charset="-127"/>
               </a:rPr>
-              <a:t>업데이트 시간 : 10/3 22시</a:t>
+              <a:t>업데이트 시간 : 10/4 8시</a:t>
             </a:r>
             <a:endParaRPr lang="ko-KR" sz="1100">
               <a:latin typeface="+mn-lt"/>
